--- a/pitch/ruko-trackD.pptx
+++ b/pitch/ruko-trackD.pptx
@@ -2383,7 +2383,7 @@
                 <a:ea typeface="Calibri" pitchFamily="34" charset="-122"/>
                 <a:cs typeface="Calibri" pitchFamily="34" charset="-120"/>
               </a:rPr>
-              <a:t>Same engine in app + Telegram (IST-correct). 130+ vitest checks, eval/cases.json.</a:t>
+              <a:t>Same engine in app + Telegram (IST-correct). 140+ vitest checks, eval/cases.json.</a:t>
             </a:r>
             <a:endParaRPr lang="en-US" sz="1400" dirty="0"/>
           </a:p>
